--- a/figs/DIY_figures_cpe.pptx
+++ b/figs/DIY_figures_cpe.pptx
@@ -8,6 +8,7 @@
     <p:sldId id="257" r:id="rId2"/>
     <p:sldId id="258" r:id="rId3"/>
     <p:sldId id="259" r:id="rId4"/>
+    <p:sldId id="260" r:id="rId5"/>
   </p:sldIdLst>
   <p:sldSz cx="12192000" cy="6858000"/>
   <p:notesSz cx="6858000" cy="9144000"/>
@@ -261,7 +262,7 @@
           <a:p>
             <a:fld id="{C2AC3F85-BBC2-E74E-8790-0F6C20224DB3}" type="datetimeFigureOut">
               <a:rPr kumimoji="1" lang="ja-JP" altLang="en-US" smtClean="0"/>
-              <a:t>2026/9/1</a:t>
+              <a:t>2026/9/11</a:t>
             </a:fld>
             <a:endParaRPr kumimoji="1" lang="ja-JP" altLang="en-US"/>
           </a:p>
@@ -491,7 +492,7 @@
           <a:p>
             <a:fld id="{C2AC3F85-BBC2-E74E-8790-0F6C20224DB3}" type="datetimeFigureOut">
               <a:rPr kumimoji="1" lang="ja-JP" altLang="en-US" smtClean="0"/>
-              <a:t>2026/9/1</a:t>
+              <a:t>2026/9/11</a:t>
             </a:fld>
             <a:endParaRPr kumimoji="1" lang="ja-JP" altLang="en-US"/>
           </a:p>
@@ -731,7 +732,7 @@
           <a:p>
             <a:fld id="{C2AC3F85-BBC2-E74E-8790-0F6C20224DB3}" type="datetimeFigureOut">
               <a:rPr kumimoji="1" lang="ja-JP" altLang="en-US" smtClean="0"/>
-              <a:t>2026/9/1</a:t>
+              <a:t>2026/9/11</a:t>
             </a:fld>
             <a:endParaRPr kumimoji="1" lang="ja-JP" altLang="en-US"/>
           </a:p>
@@ -961,7 +962,7 @@
           <a:p>
             <a:fld id="{C2AC3F85-BBC2-E74E-8790-0F6C20224DB3}" type="datetimeFigureOut">
               <a:rPr kumimoji="1" lang="ja-JP" altLang="en-US" smtClean="0"/>
-              <a:t>2026/9/1</a:t>
+              <a:t>2026/9/11</a:t>
             </a:fld>
             <a:endParaRPr kumimoji="1" lang="ja-JP" altLang="en-US"/>
           </a:p>
@@ -1236,7 +1237,7 @@
           <a:p>
             <a:fld id="{C2AC3F85-BBC2-E74E-8790-0F6C20224DB3}" type="datetimeFigureOut">
               <a:rPr kumimoji="1" lang="ja-JP" altLang="en-US" smtClean="0"/>
-              <a:t>2026/9/1</a:t>
+              <a:t>2026/9/11</a:t>
             </a:fld>
             <a:endParaRPr kumimoji="1" lang="ja-JP" altLang="en-US"/>
           </a:p>
@@ -1565,7 +1566,7 @@
           <a:p>
             <a:fld id="{C2AC3F85-BBC2-E74E-8790-0F6C20224DB3}" type="datetimeFigureOut">
               <a:rPr kumimoji="1" lang="ja-JP" altLang="en-US" smtClean="0"/>
-              <a:t>2026/9/1</a:t>
+              <a:t>2026/9/11</a:t>
             </a:fld>
             <a:endParaRPr kumimoji="1" lang="ja-JP" altLang="en-US"/>
           </a:p>
@@ -2041,7 +2042,7 @@
           <a:p>
             <a:fld id="{C2AC3F85-BBC2-E74E-8790-0F6C20224DB3}" type="datetimeFigureOut">
               <a:rPr kumimoji="1" lang="ja-JP" altLang="en-US" smtClean="0"/>
-              <a:t>2026/9/1</a:t>
+              <a:t>2026/9/11</a:t>
             </a:fld>
             <a:endParaRPr kumimoji="1" lang="ja-JP" altLang="en-US"/>
           </a:p>
@@ -2182,7 +2183,7 @@
           <a:p>
             <a:fld id="{C2AC3F85-BBC2-E74E-8790-0F6C20224DB3}" type="datetimeFigureOut">
               <a:rPr kumimoji="1" lang="ja-JP" altLang="en-US" smtClean="0"/>
-              <a:t>2026/9/1</a:t>
+              <a:t>2026/9/11</a:t>
             </a:fld>
             <a:endParaRPr kumimoji="1" lang="ja-JP" altLang="en-US"/>
           </a:p>
@@ -2295,7 +2296,7 @@
           <a:p>
             <a:fld id="{C2AC3F85-BBC2-E74E-8790-0F6C20224DB3}" type="datetimeFigureOut">
               <a:rPr kumimoji="1" lang="ja-JP" altLang="en-US" smtClean="0"/>
-              <a:t>2026/9/1</a:t>
+              <a:t>2026/9/11</a:t>
             </a:fld>
             <a:endParaRPr kumimoji="1" lang="ja-JP" altLang="en-US"/>
           </a:p>
@@ -2638,7 +2639,7 @@
           <a:p>
             <a:fld id="{C2AC3F85-BBC2-E74E-8790-0F6C20224DB3}" type="datetimeFigureOut">
               <a:rPr kumimoji="1" lang="ja-JP" altLang="en-US" smtClean="0"/>
-              <a:t>2026/9/1</a:t>
+              <a:t>2026/9/11</a:t>
             </a:fld>
             <a:endParaRPr kumimoji="1" lang="ja-JP" altLang="en-US"/>
           </a:p>
@@ -2926,7 +2927,7 @@
           <a:p>
             <a:fld id="{C2AC3F85-BBC2-E74E-8790-0F6C20224DB3}" type="datetimeFigureOut">
               <a:rPr kumimoji="1" lang="ja-JP" altLang="en-US" smtClean="0"/>
-              <a:t>2026/9/1</a:t>
+              <a:t>2026/9/11</a:t>
             </a:fld>
             <a:endParaRPr kumimoji="1" lang="ja-JP" altLang="en-US"/>
           </a:p>
@@ -3199,7 +3200,7 @@
           <a:p>
             <a:fld id="{C2AC3F85-BBC2-E74E-8790-0F6C20224DB3}" type="datetimeFigureOut">
               <a:rPr kumimoji="1" lang="ja-JP" altLang="en-US" smtClean="0"/>
-              <a:t>2026/9/1</a:t>
+              <a:t>2026/9/11</a:t>
             </a:fld>
             <a:endParaRPr kumimoji="1" lang="ja-JP" altLang="en-US"/>
           </a:p>
@@ -7723,6 +7724,587 @@
 </p:sld>
 </file>
 
+<file path=ppt/slides/slide4.xml><?xml version="1.0" encoding="utf-8"?>
+<p:sld xmlns:a="http://schemas.openxmlformats.org/drawingml/2006/main" xmlns:r="http://schemas.openxmlformats.org/officeDocument/2006/relationships" xmlns:p="http://schemas.openxmlformats.org/presentationml/2006/main">
+  <p:cSld>
+    <p:spTree>
+      <p:nvGrpSpPr>
+        <p:cNvPr id="1" name=""/>
+        <p:cNvGrpSpPr/>
+        <p:nvPr/>
+      </p:nvGrpSpPr>
+      <p:grpSpPr>
+        <a:xfrm>
+          <a:off x="0" y="0"/>
+          <a:ext cx="0" cy="0"/>
+          <a:chOff x="0" y="0"/>
+          <a:chExt cx="0" cy="0"/>
+        </a:xfrm>
+      </p:grpSpPr>
+      <p:grpSp>
+        <p:nvGrpSpPr>
+          <p:cNvPr id="18" name="グループ化 17">
+            <a:extLst>
+              <a:ext uri="{FF2B5EF4-FFF2-40B4-BE49-F238E27FC236}">
+                <a16:creationId xmlns:a16="http://schemas.microsoft.com/office/drawing/2014/main" id="{7AE0B157-05DD-BE00-DCC0-C8DFF85ACF93}"/>
+              </a:ext>
+            </a:extLst>
+          </p:cNvPr>
+          <p:cNvGrpSpPr/>
+          <p:nvPr/>
+        </p:nvGrpSpPr>
+        <p:grpSpPr>
+          <a:xfrm>
+            <a:off x="448967" y="857823"/>
+            <a:ext cx="11294065" cy="5142354"/>
+            <a:chOff x="448967" y="857823"/>
+            <a:chExt cx="11294065" cy="5142354"/>
+          </a:xfrm>
+        </p:grpSpPr>
+        <p:sp>
+          <p:nvSpPr>
+            <p:cNvPr id="2" name="角丸四角形 1">
+              <a:extLst>
+                <a:ext uri="{FF2B5EF4-FFF2-40B4-BE49-F238E27FC236}">
+                  <a16:creationId xmlns:a16="http://schemas.microsoft.com/office/drawing/2014/main" id="{BC8BB509-20E2-F64D-B6EE-07071E9E789D}"/>
+                </a:ext>
+              </a:extLst>
+            </p:cNvPr>
+            <p:cNvSpPr/>
+            <p:nvPr/>
+          </p:nvSpPr>
+          <p:spPr>
+            <a:xfrm>
+              <a:off x="3965186" y="857823"/>
+              <a:ext cx="4261627" cy="1140466"/>
+            </a:xfrm>
+            <a:prstGeom prst="roundRect">
+              <a:avLst/>
+            </a:prstGeom>
+            <a:solidFill>
+              <a:schemeClr val="bg1"/>
+            </a:solidFill>
+            <a:ln w="12700"/>
+          </p:spPr>
+          <p:style>
+            <a:lnRef idx="2">
+              <a:schemeClr val="accent1">
+                <a:shade val="15000"/>
+              </a:schemeClr>
+            </a:lnRef>
+            <a:fillRef idx="1">
+              <a:schemeClr val="accent1"/>
+            </a:fillRef>
+            <a:effectRef idx="0">
+              <a:schemeClr val="accent1"/>
+            </a:effectRef>
+            <a:fontRef idx="minor">
+              <a:schemeClr val="lt1"/>
+            </a:fontRef>
+          </p:style>
+          <p:txBody>
+            <a:bodyPr rtlCol="0" anchor="ctr"/>
+            <a:lstStyle/>
+            <a:p>
+              <a:pPr algn="ctr"/>
+              <a:r>
+                <a:rPr lang="ja-JP" altLang="en-US" sz="2800" b="1">
+                  <a:solidFill>
+                    <a:schemeClr val="tx1"/>
+                  </a:solidFill>
+                  <a:latin typeface="Hiragino Sans W8" panose="020B0400000000000000" pitchFamily="34" charset="-128"/>
+                  <a:ea typeface="Hiragino Sans W8" panose="020B0400000000000000" pitchFamily="34" charset="-128"/>
+                </a:rPr>
+                <a:t>グローバル化</a:t>
+              </a:r>
+              <a:endParaRPr lang="en-US" altLang="ja-JP" sz="2400" dirty="0">
+                <a:solidFill>
+                  <a:schemeClr val="tx1"/>
+                </a:solidFill>
+                <a:latin typeface="Hiragino Sans W4" panose="020B0400000000000000" pitchFamily="34" charset="-128"/>
+                <a:ea typeface="Hiragino Sans W4" panose="020B0400000000000000" pitchFamily="34" charset="-128"/>
+              </a:endParaRPr>
+            </a:p>
+          </p:txBody>
+        </p:sp>
+        <p:sp>
+          <p:nvSpPr>
+            <p:cNvPr id="3" name="角丸四角形 2">
+              <a:extLst>
+                <a:ext uri="{FF2B5EF4-FFF2-40B4-BE49-F238E27FC236}">
+                  <a16:creationId xmlns:a16="http://schemas.microsoft.com/office/drawing/2014/main" id="{B75BA1BC-6E4E-8EC3-7B91-1617FC644DE9}"/>
+                </a:ext>
+              </a:extLst>
+            </p:cNvPr>
+            <p:cNvSpPr/>
+            <p:nvPr/>
+          </p:nvSpPr>
+          <p:spPr>
+            <a:xfrm>
+              <a:off x="448970" y="3812425"/>
+              <a:ext cx="4261627" cy="1140466"/>
+            </a:xfrm>
+            <a:prstGeom prst="roundRect">
+              <a:avLst/>
+            </a:prstGeom>
+            <a:solidFill>
+              <a:schemeClr val="bg1"/>
+            </a:solidFill>
+            <a:ln w="12700"/>
+          </p:spPr>
+          <p:style>
+            <a:lnRef idx="2">
+              <a:schemeClr val="accent1">
+                <a:shade val="15000"/>
+              </a:schemeClr>
+            </a:lnRef>
+            <a:fillRef idx="1">
+              <a:schemeClr val="accent1"/>
+            </a:fillRef>
+            <a:effectRef idx="0">
+              <a:schemeClr val="accent1"/>
+            </a:effectRef>
+            <a:fontRef idx="minor">
+              <a:schemeClr val="lt1"/>
+            </a:fontRef>
+          </p:style>
+          <p:txBody>
+            <a:bodyPr rtlCol="0" anchor="ctr"/>
+            <a:lstStyle/>
+            <a:p>
+              <a:pPr algn="ctr"/>
+              <a:r>
+                <a:rPr lang="ja-JP" altLang="en-US" sz="2800" b="1">
+                  <a:solidFill>
+                    <a:schemeClr val="tx1"/>
+                  </a:solidFill>
+                  <a:latin typeface="Hiragino Sans W8" panose="020B0400000000000000" pitchFamily="34" charset="-128"/>
+                  <a:ea typeface="Hiragino Sans W8" panose="020B0400000000000000" pitchFamily="34" charset="-128"/>
+                </a:rPr>
+                <a:t>国家主権</a:t>
+              </a:r>
+              <a:endParaRPr lang="en-US" altLang="ja-JP" sz="2400" dirty="0">
+                <a:solidFill>
+                  <a:schemeClr val="tx1"/>
+                </a:solidFill>
+                <a:latin typeface="Hiragino Sans W4" panose="020B0400000000000000" pitchFamily="34" charset="-128"/>
+                <a:ea typeface="Hiragino Sans W4" panose="020B0400000000000000" pitchFamily="34" charset="-128"/>
+              </a:endParaRPr>
+            </a:p>
+          </p:txBody>
+        </p:sp>
+        <p:sp>
+          <p:nvSpPr>
+            <p:cNvPr id="4" name="角丸四角形 3">
+              <a:extLst>
+                <a:ext uri="{FF2B5EF4-FFF2-40B4-BE49-F238E27FC236}">
+                  <a16:creationId xmlns:a16="http://schemas.microsoft.com/office/drawing/2014/main" id="{BD720F91-5D6A-A706-3193-3231E9C19AF5}"/>
+                </a:ext>
+              </a:extLst>
+            </p:cNvPr>
+            <p:cNvSpPr/>
+            <p:nvPr/>
+          </p:nvSpPr>
+          <p:spPr>
+            <a:xfrm>
+              <a:off x="7481405" y="3812425"/>
+              <a:ext cx="4261627" cy="1140466"/>
+            </a:xfrm>
+            <a:prstGeom prst="roundRect">
+              <a:avLst/>
+            </a:prstGeom>
+            <a:solidFill>
+              <a:schemeClr val="bg1"/>
+            </a:solidFill>
+            <a:ln w="12700"/>
+          </p:spPr>
+          <p:style>
+            <a:lnRef idx="2">
+              <a:schemeClr val="accent1">
+                <a:shade val="15000"/>
+              </a:schemeClr>
+            </a:lnRef>
+            <a:fillRef idx="1">
+              <a:schemeClr val="accent1"/>
+            </a:fillRef>
+            <a:effectRef idx="0">
+              <a:schemeClr val="accent1"/>
+            </a:effectRef>
+            <a:fontRef idx="minor">
+              <a:schemeClr val="lt1"/>
+            </a:fontRef>
+          </p:style>
+          <p:txBody>
+            <a:bodyPr rtlCol="0" anchor="ctr"/>
+            <a:lstStyle/>
+            <a:p>
+              <a:pPr algn="ctr"/>
+              <a:r>
+                <a:rPr lang="ja-JP" altLang="en-US" sz="2800" b="1">
+                  <a:solidFill>
+                    <a:schemeClr val="tx1"/>
+                  </a:solidFill>
+                  <a:latin typeface="Hiragino Sans W8" panose="020B0400000000000000" pitchFamily="34" charset="-128"/>
+                  <a:ea typeface="Hiragino Sans W8" panose="020B0400000000000000" pitchFamily="34" charset="-128"/>
+                </a:rPr>
+                <a:t>民主主義</a:t>
+              </a:r>
+              <a:endParaRPr lang="en-US" altLang="ja-JP" sz="2400" dirty="0">
+                <a:solidFill>
+                  <a:schemeClr val="tx1"/>
+                </a:solidFill>
+                <a:latin typeface="Hiragino Sans W4" panose="020B0400000000000000" pitchFamily="34" charset="-128"/>
+                <a:ea typeface="Hiragino Sans W4" panose="020B0400000000000000" pitchFamily="34" charset="-128"/>
+              </a:endParaRPr>
+            </a:p>
+          </p:txBody>
+        </p:sp>
+        <p:cxnSp>
+          <p:nvCxnSpPr>
+            <p:cNvPr id="6" name="直線コネクタ 5">
+              <a:extLst>
+                <a:ext uri="{FF2B5EF4-FFF2-40B4-BE49-F238E27FC236}">
+                  <a16:creationId xmlns:a16="http://schemas.microsoft.com/office/drawing/2014/main" id="{52722EB5-722B-C521-155F-26C779829DE9}"/>
+                </a:ext>
+              </a:extLst>
+            </p:cNvPr>
+            <p:cNvCxnSpPr>
+              <a:stCxn id="2" idx="1"/>
+              <a:endCxn id="3" idx="0"/>
+            </p:cNvCxnSpPr>
+            <p:nvPr/>
+          </p:nvCxnSpPr>
+          <p:spPr>
+            <a:xfrm flipH="1">
+              <a:off x="2579784" y="1428056"/>
+              <a:ext cx="1385402" cy="2384369"/>
+            </a:xfrm>
+            <a:prstGeom prst="line">
+              <a:avLst/>
+            </a:prstGeom>
+            <a:ln w="57150">
+              <a:solidFill>
+                <a:schemeClr val="tx1"/>
+              </a:solidFill>
+            </a:ln>
+          </p:spPr>
+          <p:style>
+            <a:lnRef idx="2">
+              <a:schemeClr val="accent1"/>
+            </a:lnRef>
+            <a:fillRef idx="0">
+              <a:schemeClr val="accent1"/>
+            </a:fillRef>
+            <a:effectRef idx="1">
+              <a:schemeClr val="accent1"/>
+            </a:effectRef>
+            <a:fontRef idx="minor">
+              <a:schemeClr val="tx1"/>
+            </a:fontRef>
+          </p:style>
+        </p:cxnSp>
+        <p:cxnSp>
+          <p:nvCxnSpPr>
+            <p:cNvPr id="7" name="直線コネクタ 6">
+              <a:extLst>
+                <a:ext uri="{FF2B5EF4-FFF2-40B4-BE49-F238E27FC236}">
+                  <a16:creationId xmlns:a16="http://schemas.microsoft.com/office/drawing/2014/main" id="{835F8169-A20F-3205-9C95-F6E88514D2E9}"/>
+                </a:ext>
+              </a:extLst>
+            </p:cNvPr>
+            <p:cNvCxnSpPr>
+              <a:cxnSpLocks/>
+              <a:stCxn id="4" idx="1"/>
+              <a:endCxn id="3" idx="3"/>
+            </p:cNvCxnSpPr>
+            <p:nvPr/>
+          </p:nvCxnSpPr>
+          <p:spPr>
+            <a:xfrm flipH="1">
+              <a:off x="4710597" y="4382658"/>
+              <a:ext cx="2770808" cy="0"/>
+            </a:xfrm>
+            <a:prstGeom prst="line">
+              <a:avLst/>
+            </a:prstGeom>
+            <a:ln w="57150">
+              <a:solidFill>
+                <a:schemeClr val="tx1"/>
+              </a:solidFill>
+            </a:ln>
+          </p:spPr>
+          <p:style>
+            <a:lnRef idx="2">
+              <a:schemeClr val="accent1"/>
+            </a:lnRef>
+            <a:fillRef idx="0">
+              <a:schemeClr val="accent1"/>
+            </a:fillRef>
+            <a:effectRef idx="1">
+              <a:schemeClr val="accent1"/>
+            </a:effectRef>
+            <a:fontRef idx="minor">
+              <a:schemeClr val="tx1"/>
+            </a:fontRef>
+          </p:style>
+        </p:cxnSp>
+        <p:cxnSp>
+          <p:nvCxnSpPr>
+            <p:cNvPr id="10" name="直線コネクタ 9">
+              <a:extLst>
+                <a:ext uri="{FF2B5EF4-FFF2-40B4-BE49-F238E27FC236}">
+                  <a16:creationId xmlns:a16="http://schemas.microsoft.com/office/drawing/2014/main" id="{DFB1CC57-1970-EB64-6791-3D6C371C04E5}"/>
+                </a:ext>
+              </a:extLst>
+            </p:cNvPr>
+            <p:cNvCxnSpPr>
+              <a:cxnSpLocks/>
+              <a:stCxn id="2" idx="3"/>
+              <a:endCxn id="4" idx="0"/>
+            </p:cNvCxnSpPr>
+            <p:nvPr/>
+          </p:nvCxnSpPr>
+          <p:spPr>
+            <a:xfrm>
+              <a:off x="8226813" y="1428056"/>
+              <a:ext cx="1385406" cy="2384369"/>
+            </a:xfrm>
+            <a:prstGeom prst="line">
+              <a:avLst/>
+            </a:prstGeom>
+            <a:ln w="57150">
+              <a:solidFill>
+                <a:schemeClr val="tx1"/>
+              </a:solidFill>
+            </a:ln>
+          </p:spPr>
+          <p:style>
+            <a:lnRef idx="2">
+              <a:schemeClr val="accent1"/>
+            </a:lnRef>
+            <a:fillRef idx="0">
+              <a:schemeClr val="accent1"/>
+            </a:fillRef>
+            <a:effectRef idx="1">
+              <a:schemeClr val="accent1"/>
+            </a:effectRef>
+            <a:fontRef idx="minor">
+              <a:schemeClr val="tx1"/>
+            </a:fontRef>
+          </p:style>
+        </p:cxnSp>
+        <p:sp>
+          <p:nvSpPr>
+            <p:cNvPr id="13" name="テキスト ボックス 12">
+              <a:extLst>
+                <a:ext uri="{FF2B5EF4-FFF2-40B4-BE49-F238E27FC236}">
+                  <a16:creationId xmlns:a16="http://schemas.microsoft.com/office/drawing/2014/main" id="{AE03FF55-B202-DC0C-E0C1-02811C727B42}"/>
+                </a:ext>
+              </a:extLst>
+            </p:cNvPr>
+            <p:cNvSpPr txBox="1"/>
+            <p:nvPr/>
+          </p:nvSpPr>
+          <p:spPr>
+            <a:xfrm>
+              <a:off x="448967" y="1717852"/>
+              <a:ext cx="2973891" cy="954107"/>
+            </a:xfrm>
+            <a:prstGeom prst="rect">
+              <a:avLst/>
+            </a:prstGeom>
+            <a:noFill/>
+          </p:spPr>
+          <p:txBody>
+            <a:bodyPr wrap="none" rtlCol="0">
+              <a:spAutoFit/>
+            </a:bodyPr>
+            <a:lstStyle/>
+            <a:p>
+              <a:pPr algn="ctr"/>
+              <a:r>
+                <a:rPr kumimoji="1" lang="ja-JP" altLang="en-US" sz="2800" b="1">
+                  <a:latin typeface="Hiragino Sans W4" panose="020B0400000000000000" pitchFamily="34" charset="-128"/>
+                  <a:ea typeface="Hiragino Sans W4" panose="020B0400000000000000" pitchFamily="34" charset="-128"/>
+                </a:rPr>
+                <a:t>金本位制</a:t>
+              </a:r>
+              <a:endParaRPr kumimoji="1" lang="en-US" altLang="ja-JP" sz="2800" b="1" dirty="0">
+                <a:latin typeface="Hiragino Sans W4" panose="020B0400000000000000" pitchFamily="34" charset="-128"/>
+                <a:ea typeface="Hiragino Sans W4" panose="020B0400000000000000" pitchFamily="34" charset="-128"/>
+              </a:endParaRPr>
+            </a:p>
+            <a:p>
+              <a:pPr algn="ctr"/>
+              <a:r>
+                <a:rPr kumimoji="1" lang="ja-JP" altLang="en-US" sz="2800">
+                  <a:latin typeface="Hiragino Sans W4" panose="020B0400000000000000" pitchFamily="34" charset="-128"/>
+                  <a:ea typeface="Hiragino Sans W4" panose="020B0400000000000000" pitchFamily="34" charset="-128"/>
+                </a:rPr>
+                <a:t>（</a:t>
+              </a:r>
+              <a:r>
+                <a:rPr kumimoji="1" lang="en-US" altLang="ja-JP" sz="2800" dirty="0">
+                  <a:latin typeface="Hiragino Sans W4" panose="020B0400000000000000" pitchFamily="34" charset="-128"/>
+                  <a:ea typeface="Hiragino Sans W4" panose="020B0400000000000000" pitchFamily="34" charset="-128"/>
+                </a:rPr>
+                <a:t>1870-1914</a:t>
+              </a:r>
+              <a:r>
+                <a:rPr kumimoji="1" lang="ja-JP" altLang="en-US" sz="2800">
+                  <a:latin typeface="Hiragino Sans W4" panose="020B0400000000000000" pitchFamily="34" charset="-128"/>
+                  <a:ea typeface="Hiragino Sans W4" panose="020B0400000000000000" pitchFamily="34" charset="-128"/>
+                </a:rPr>
+                <a:t>）</a:t>
+              </a:r>
+            </a:p>
+          </p:txBody>
+        </p:sp>
+        <p:sp>
+          <p:nvSpPr>
+            <p:cNvPr id="14" name="テキスト ボックス 13">
+              <a:extLst>
+                <a:ext uri="{FF2B5EF4-FFF2-40B4-BE49-F238E27FC236}">
+                  <a16:creationId xmlns:a16="http://schemas.microsoft.com/office/drawing/2014/main" id="{820E6EFE-D6F4-FB30-6E9C-606D0FCD6CE3}"/>
+                </a:ext>
+              </a:extLst>
+            </p:cNvPr>
+            <p:cNvSpPr txBox="1"/>
+            <p:nvPr/>
+          </p:nvSpPr>
+          <p:spPr>
+            <a:xfrm>
+              <a:off x="4176246" y="5046070"/>
+              <a:ext cx="3839513" cy="954107"/>
+            </a:xfrm>
+            <a:prstGeom prst="rect">
+              <a:avLst/>
+            </a:prstGeom>
+            <a:noFill/>
+          </p:spPr>
+          <p:txBody>
+            <a:bodyPr wrap="none" rtlCol="0">
+              <a:spAutoFit/>
+            </a:bodyPr>
+            <a:lstStyle/>
+            <a:p>
+              <a:pPr algn="ctr"/>
+              <a:r>
+                <a:rPr kumimoji="1" lang="ja-JP" altLang="en-US" sz="2800" b="1">
+                  <a:latin typeface="Hiragino Sans W4" panose="020B0400000000000000" pitchFamily="34" charset="-128"/>
+                  <a:ea typeface="Hiragino Sans W4" panose="020B0400000000000000" pitchFamily="34" charset="-128"/>
+                </a:rPr>
+                <a:t>ブレトンウッズの妥協</a:t>
+              </a:r>
+              <a:endParaRPr kumimoji="1" lang="en-US" altLang="ja-JP" sz="2800" b="1" dirty="0">
+                <a:latin typeface="Hiragino Sans W4" panose="020B0400000000000000" pitchFamily="34" charset="-128"/>
+                <a:ea typeface="Hiragino Sans W4" panose="020B0400000000000000" pitchFamily="34" charset="-128"/>
+              </a:endParaRPr>
+            </a:p>
+            <a:p>
+              <a:pPr algn="ctr"/>
+              <a:r>
+                <a:rPr kumimoji="1" lang="ja-JP" altLang="en-US" sz="2800">
+                  <a:latin typeface="Hiragino Sans W4" panose="020B0400000000000000" pitchFamily="34" charset="-128"/>
+                  <a:ea typeface="Hiragino Sans W4" panose="020B0400000000000000" pitchFamily="34" charset="-128"/>
+                </a:rPr>
+                <a:t>（</a:t>
+              </a:r>
+              <a:r>
+                <a:rPr lang="en-US" altLang="ja-JP" sz="2800" dirty="0">
+                  <a:latin typeface="Hiragino Sans W4" panose="020B0400000000000000" pitchFamily="34" charset="-128"/>
+                  <a:ea typeface="Hiragino Sans W4" panose="020B0400000000000000" pitchFamily="34" charset="-128"/>
+                </a:rPr>
+                <a:t>1945</a:t>
+              </a:r>
+              <a:r>
+                <a:rPr kumimoji="1" lang="en-US" altLang="ja-JP" sz="2800" dirty="0">
+                  <a:latin typeface="Hiragino Sans W4" panose="020B0400000000000000" pitchFamily="34" charset="-128"/>
+                  <a:ea typeface="Hiragino Sans W4" panose="020B0400000000000000" pitchFamily="34" charset="-128"/>
+                </a:rPr>
+                <a:t>-75</a:t>
+              </a:r>
+              <a:r>
+                <a:rPr kumimoji="1" lang="ja-JP" altLang="en-US" sz="2800">
+                  <a:latin typeface="Hiragino Sans W4" panose="020B0400000000000000" pitchFamily="34" charset="-128"/>
+                  <a:ea typeface="Hiragino Sans W4" panose="020B0400000000000000" pitchFamily="34" charset="-128"/>
+                </a:rPr>
+                <a:t>）</a:t>
+              </a:r>
+            </a:p>
+          </p:txBody>
+        </p:sp>
+        <p:sp>
+          <p:nvSpPr>
+            <p:cNvPr id="15" name="テキスト ボックス 14">
+              <a:extLst>
+                <a:ext uri="{FF2B5EF4-FFF2-40B4-BE49-F238E27FC236}">
+                  <a16:creationId xmlns:a16="http://schemas.microsoft.com/office/drawing/2014/main" id="{5A670ACA-CF71-731B-F6BE-06BD711C0C21}"/>
+                </a:ext>
+              </a:extLst>
+            </p:cNvPr>
+            <p:cNvSpPr txBox="1"/>
+            <p:nvPr/>
+          </p:nvSpPr>
+          <p:spPr>
+            <a:xfrm>
+              <a:off x="8919516" y="1717852"/>
+              <a:ext cx="2377574" cy="954107"/>
+            </a:xfrm>
+            <a:prstGeom prst="rect">
+              <a:avLst/>
+            </a:prstGeom>
+            <a:noFill/>
+          </p:spPr>
+          <p:txBody>
+            <a:bodyPr wrap="none" rtlCol="0">
+              <a:spAutoFit/>
+            </a:bodyPr>
+            <a:lstStyle/>
+            <a:p>
+              <a:pPr algn="ctr"/>
+              <a:r>
+                <a:rPr kumimoji="1" lang="ja-JP" altLang="en-US" sz="2800" b="1">
+                  <a:latin typeface="Hiragino Sans W4" panose="020B0400000000000000" pitchFamily="34" charset="-128"/>
+                  <a:ea typeface="Hiragino Sans W4" panose="020B0400000000000000" pitchFamily="34" charset="-128"/>
+                </a:rPr>
+                <a:t>グローバル・</a:t>
+              </a:r>
+              <a:endParaRPr kumimoji="1" lang="en-US" altLang="ja-JP" sz="2800" b="1" dirty="0">
+                <a:latin typeface="Hiragino Sans W4" panose="020B0400000000000000" pitchFamily="34" charset="-128"/>
+                <a:ea typeface="Hiragino Sans W4" panose="020B0400000000000000" pitchFamily="34" charset="-128"/>
+              </a:endParaRPr>
+            </a:p>
+            <a:p>
+              <a:pPr algn="ctr"/>
+              <a:r>
+                <a:rPr lang="ja-JP" altLang="en-US" sz="2800" b="1">
+                  <a:latin typeface="Hiragino Sans W4" panose="020B0400000000000000" pitchFamily="34" charset="-128"/>
+                  <a:ea typeface="Hiragino Sans W4" panose="020B0400000000000000" pitchFamily="34" charset="-128"/>
+                </a:rPr>
+                <a:t>ガバナンス</a:t>
+              </a:r>
+              <a:endParaRPr kumimoji="1" lang="ja-JP" altLang="en-US" sz="2800">
+                <a:latin typeface="Hiragino Sans W4" panose="020B0400000000000000" pitchFamily="34" charset="-128"/>
+                <a:ea typeface="Hiragino Sans W4" panose="020B0400000000000000" pitchFamily="34" charset="-128"/>
+              </a:endParaRPr>
+            </a:p>
+          </p:txBody>
+        </p:sp>
+      </p:grpSp>
+    </p:spTree>
+    <p:extLst>
+      <p:ext uri="{BB962C8B-B14F-4D97-AF65-F5344CB8AC3E}">
+        <p14:creationId xmlns:p14="http://schemas.microsoft.com/office/powerpoint/2010/main" val="872079803"/>
+      </p:ext>
+    </p:extLst>
+  </p:cSld>
+  <p:clrMapOvr>
+    <a:masterClrMapping/>
+  </p:clrMapOvr>
+</p:sld>
+</file>
+
 <file path=ppt/theme/theme1.xml><?xml version="1.0" encoding="utf-8"?>
 <a:theme xmlns:a="http://schemas.openxmlformats.org/drawingml/2006/main" name="Office テーマ">
   <a:themeElements>
